--- a/assets/demo/northstar-strategy-showcase.pptx
+++ b/assets/demo/northstar-strategy-showcase.pptx
@@ -2,15 +2,15 @@
 <file path=ppt/presentation.xml><?xml version="1.0" encoding="utf-8"?>
 <p:presentation xmlns:p="http://schemas.openxmlformats.org/presentationml/2006/main">
   <p:sldMasterIdLst>
-    <p:sldMasterId xmlns:r="http://schemas.openxmlformats.org/officeDocument/2006/relationships" id="2147483648" r:id="R31556e972d4c4a5b"/>
+    <p:sldMasterId xmlns:r="http://schemas.openxmlformats.org/officeDocument/2006/relationships" id="2147483648" r:id="R86e0c290e5804af4"/>
   </p:sldMasterIdLst>
   <p:notesMasterIdLst>
-    <p:notesMasterId xmlns:r="http://schemas.openxmlformats.org/officeDocument/2006/relationships" r:id="Rdc8091812f0b417e"/>
+    <p:notesMasterId xmlns:r="http://schemas.openxmlformats.org/officeDocument/2006/relationships" r:id="R995b55fb2da9444e"/>
   </p:notesMasterIdLst>
   <p:sldIdLst>
-    <p:sldId xmlns:r="http://schemas.openxmlformats.org/officeDocument/2006/relationships" id="256" r:id="Rf2e7cc2eacc44173"/>
-    <p:sldId xmlns:r="http://schemas.openxmlformats.org/officeDocument/2006/relationships" id="257" r:id="R31a32ca67fd246ba"/>
-    <p:sldId xmlns:r="http://schemas.openxmlformats.org/officeDocument/2006/relationships" id="258" r:id="R753daff502c541b4"/>
+    <p:sldId xmlns:r="http://schemas.openxmlformats.org/officeDocument/2006/relationships" id="256" r:id="R560ab2e59ac14018"/>
+    <p:sldId xmlns:r="http://schemas.openxmlformats.org/officeDocument/2006/relationships" id="257" r:id="Rc57b61589e6348c9"/>
+    <p:sldId xmlns:r="http://schemas.openxmlformats.org/officeDocument/2006/relationships" id="258" r:id="R5f0c4f5bed8e4358"/>
   </p:sldIdLst>
   <p:sldSz cx="12192000" cy="6858000"/>
   <p:notesSz cx="6858000" cy="9144000"/>
@@ -444,7 +444,7 @@
           <a:lstStyle xmlns:a="http://schemas.openxmlformats.org/drawingml/2006/main"/>
           <a:p xmlns:a="http://schemas.openxmlformats.org/drawingml/2006/main">
             <a:r>
-              <a:t>All company names, inputs, economics and recommendations in this deck are fictional and synthetic. No employer information. Assumptions: 20 sites, 100 monthly visits per site, $500 revenue per visit. Base direct cost 62%, downside 70%. Fixed monthly cost $260,000. Monthly revenue $1,000,000. Base contribution $120,000, downside $40,000. Illustrative analysis, not a real engagement or demonstrated business impact.</a:t>
+              <a:t>All company names, inputs, economics and recommendations in this deck are fictional and synthetic. No employer information. Assumptions: 20 sites, 100 monthly visits per site, $500 revenue per visit. Base direct cost 62%, downside 70%. Fixed monthly cost $260,000. Monthly revenue $1,000,000. Base operating surplus $120,000, downside $40,000. Illustrative analysis, not a real engagement or demonstrated business impact.</a:t>
             </a:r>
           </a:p>
         </p:txBody>
@@ -514,7 +514,7 @@
           <a:lstStyle xmlns:a="http://schemas.openxmlformats.org/drawingml/2006/main"/>
           <a:p xmlns:a="http://schemas.openxmlformats.org/drawingml/2006/main">
             <a:r>
-              <a:t>All company names, inputs, economics and recommendations in this deck are fictional and synthetic. No employer information. Assumptions: 20 sites, 100 monthly visits per site, $500 revenue per visit. Base direct cost 62%, downside 70%. Fixed monthly cost $260,000. Monthly revenue $1,000,000. Base contribution $120,000, downside $40,000. Illustrative analysis, not a real engagement or demonstrated business impact.</a:t>
+              <a:t>All company names, inputs, economics and recommendations in this deck are fictional and synthetic. No employer information. Assumptions: 20 sites, 100 monthly visits per site, $500 revenue per visit. Base direct cost 62%, downside 70%. Fixed monthly cost $260,000. Monthly revenue $1,000,000. Base operating surplus $120,000, downside $40,000. Illustrative analysis, not a real engagement or demonstrated business impact.</a:t>
             </a:r>
           </a:p>
         </p:txBody>
@@ -584,7 +584,7 @@
           <a:lstStyle xmlns:a="http://schemas.openxmlformats.org/drawingml/2006/main"/>
           <a:p xmlns:a="http://schemas.openxmlformats.org/drawingml/2006/main">
             <a:r>
-              <a:t>All company names, inputs, economics and recommendations in this deck are fictional and synthetic. No employer information. Assumptions: 20 sites, 100 monthly visits per site, $500 revenue per visit. Base direct cost 62%, downside 70%. Fixed monthly cost $260,000. Monthly revenue $1,000,000. Base contribution $120,000, downside $40,000. Illustrative analysis, not a real engagement or demonstrated business impact.</a:t>
+              <a:t>All company names, inputs, economics and recommendations in this deck are fictional and synthetic. No employer information. Assumptions: 20 sites, 100 monthly visits per site, $500 revenue per visit. Base direct cost 62%, downside 70%. Fixed monthly cost $260,000. Monthly revenue $1,000,000. Base operating surplus $120,000, downside $40,000. Illustrative analysis, not a real engagement or demonstrated business impact.</a:t>
             </a:r>
           </a:p>
         </p:txBody>
@@ -652,7 +652,7 @@
   </p:cSld>
   <p:clrMap bg1="lt1" tx1="dk1" bg2="lt2" tx2="dk2" accent1="accent1" accent2="accent2" accent3="accent3" accent4="accent4" accent5="accent5" accent6="accent6" hlink="hlink" folHlink="folHlink"/>
   <p:sldLayoutIdLst>
-    <p:sldLayoutId xmlns:r="http://schemas.openxmlformats.org/officeDocument/2006/relationships" id="2147483649" r:id="R2eee434ccbe24fb2"/>
+    <p:sldLayoutId xmlns:r="http://schemas.openxmlformats.org/officeDocument/2006/relationships" id="2147483649" r:id="Rbc734946f3f54911"/>
   </p:sldLayoutIdLst>
   <p:txStyles>
     <p:titleStyle>
@@ -1192,7 +1192,7 @@
           <c:idx val="0"/>
           <c:order val="0"/>
           <c:tx>
-            <c:v>Contribution ($000)</c:v>
+            <c:v>Operating surplus ($000)</c:v>
           </c:tx>
           <c:spPr>
             <a:solidFill xmlns:a="http://schemas.openxmlformats.org/drawingml/2006/main">
@@ -1371,7 +1371,7 @@
           <p:cNvPr id="12" name="">
             <a:extLst xmlns:a="http://schemas.openxmlformats.org/drawingml/2006/main">
               <a:ext uri="{FF2B5EF4-FFF2-40B4-BE49-F238E27FC236}">
-                <a16:creationId xmlns:a16="http://schemas.microsoft.com/office/drawing/2014/main" id="{44148A9D-E91D-40FA-8B3C-5A4DFDADB343}"/>
+                <a16:creationId xmlns:a16="http://schemas.microsoft.com/office/drawing/2014/main" id="{C7B384C1-0358-4CA7-8E2F-522BCE5D99C4}"/>
               </a:ext>
             </a:extLst>
           </p:cNvPr>
@@ -1428,7 +1428,7 @@
           <p:cNvPr id="2" name="">
             <a:extLst xmlns:a="http://schemas.openxmlformats.org/drawingml/2006/main">
               <a:ext uri="{FF2B5EF4-FFF2-40B4-BE49-F238E27FC236}">
-                <a16:creationId xmlns:a16="http://schemas.microsoft.com/office/drawing/2014/main" id="{2522A562-D9C2-40CC-87C5-05DEDF956254}"/>
+                <a16:creationId xmlns:a16="http://schemas.microsoft.com/office/drawing/2014/main" id="{720FC31D-1787-469F-B8C3-BA339E83FC81}"/>
               </a:ext>
             </a:extLst>
           </p:cNvPr>
@@ -1485,7 +1485,7 @@
           <p:cNvPr id="3" name="">
             <a:extLst xmlns:a="http://schemas.openxmlformats.org/drawingml/2006/main">
               <a:ext uri="{FF2B5EF4-FFF2-40B4-BE49-F238E27FC236}">
-                <a16:creationId xmlns:a16="http://schemas.microsoft.com/office/drawing/2014/main" id="{31B81781-3057-4D23-B3C7-FA839F349F36}"/>
+                <a16:creationId xmlns:a16="http://schemas.microsoft.com/office/drawing/2014/main" id="{CC3F2E4A-A1A3-4987-8488-99932E76B188}"/>
               </a:ext>
             </a:extLst>
           </p:cNvPr>
@@ -1542,7 +1542,7 @@
           <p:cNvPr id="4" name="">
             <a:extLst xmlns:a="http://schemas.openxmlformats.org/drawingml/2006/main">
               <a:ext uri="{FF2B5EF4-FFF2-40B4-BE49-F238E27FC236}">
-                <a16:creationId xmlns:a16="http://schemas.microsoft.com/office/drawing/2014/main" id="{3FDB736E-F568-4F17-80D5-7067FDF0871B}"/>
+                <a16:creationId xmlns:a16="http://schemas.microsoft.com/office/drawing/2014/main" id="{26D02195-1938-4277-BBB8-36F5FAF6A2E8}"/>
               </a:ext>
             </a:extLst>
           </p:cNvPr>
@@ -1599,7 +1599,7 @@
           <p:cNvPr id="5" name="">
             <a:extLst xmlns:a="http://schemas.openxmlformats.org/drawingml/2006/main">
               <a:ext uri="{FF2B5EF4-FFF2-40B4-BE49-F238E27FC236}">
-                <a16:creationId xmlns:a16="http://schemas.microsoft.com/office/drawing/2014/main" id="{3F2DF516-C1B0-4A83-8FA8-14B790C2E264}"/>
+                <a16:creationId xmlns:a16="http://schemas.microsoft.com/office/drawing/2014/main" id="{10FA4ADC-96B2-4CAB-AB54-BB6CC7135958}"/>
               </a:ext>
             </a:extLst>
           </p:cNvPr>
@@ -1646,7 +1646,7 @@
                 <a:ea typeface="Arial"/>
                 <a:cs typeface="Arial"/>
               </a:rPr>
-              <a:t>Monthly contribution at 20 sites</a:t>
+              <a:t>Operating surplus at 20 sites</a:t>
             </a:r>
           </a:p>
         </p:txBody>
@@ -1663,7 +1663,7 @@
         </p:xfrm>
         <a:graphic xmlns:a="http://schemas.openxmlformats.org/drawingml/2006/main">
           <a:graphicData uri="http://schemas.openxmlformats.org/drawingml/2006/chart">
-            <c:chart xmlns:r="http://schemas.openxmlformats.org/officeDocument/2006/relationships" xmlns:c="http://schemas.openxmlformats.org/drawingml/2006/chart" r:id="R7805ba85571e49d0"/>
+            <c:chart xmlns:r="http://schemas.openxmlformats.org/officeDocument/2006/relationships" xmlns:c="http://schemas.openxmlformats.org/drawingml/2006/chart" r:id="Rf76cbacb14fa4ba5"/>
           </a:graphicData>
         </a:graphic>
       </p:graphicFrame>
@@ -1672,7 +1672,7 @@
           <p:cNvPr id="7" name="">
             <a:extLst xmlns:a="http://schemas.openxmlformats.org/drawingml/2006/main">
               <a:ext uri="{FF2B5EF4-FFF2-40B4-BE49-F238E27FC236}">
-                <a16:creationId xmlns:a16="http://schemas.microsoft.com/office/drawing/2014/main" id="{AB107559-9C39-4156-AE2A-49A2C004BE62}"/>
+                <a16:creationId xmlns:a16="http://schemas.microsoft.com/office/drawing/2014/main" id="{E18D4B09-A532-4DCD-A6D0-4107782FF423}"/>
               </a:ext>
             </a:extLst>
           </p:cNvPr>
@@ -1729,7 +1729,7 @@
           <p:cNvPr id="8" name="">
             <a:extLst xmlns:a="http://schemas.openxmlformats.org/drawingml/2006/main">
               <a:ext uri="{FF2B5EF4-FFF2-40B4-BE49-F238E27FC236}">
-                <a16:creationId xmlns:a16="http://schemas.microsoft.com/office/drawing/2014/main" id="{6B69E4F2-D086-40B2-B8FC-DAC25D51E66B}"/>
+                <a16:creationId xmlns:a16="http://schemas.microsoft.com/office/drawing/2014/main" id="{859F021A-191C-4593-AF48-E065ACDF8D0B}"/>
               </a:ext>
             </a:extLst>
           </p:cNvPr>
@@ -1809,7 +1809,7 @@
           <p:cNvPr id="9" name="">
             <a:extLst xmlns:a="http://schemas.openxmlformats.org/drawingml/2006/main">
               <a:ext uri="{FF2B5EF4-FFF2-40B4-BE49-F238E27FC236}">
-                <a16:creationId xmlns:a16="http://schemas.microsoft.com/office/drawing/2014/main" id="{68E85D72-C47E-4495-A227-2B3551E663AC}"/>
+                <a16:creationId xmlns:a16="http://schemas.microsoft.com/office/drawing/2014/main" id="{F5E47D18-2140-4711-9A4A-DD88E03F1F69}"/>
               </a:ext>
             </a:extLst>
           </p:cNvPr>
@@ -1866,7 +1866,7 @@
           <p:cNvPr id="10" name="">
             <a:extLst xmlns:a="http://schemas.openxmlformats.org/drawingml/2006/main">
               <a:ext uri="{FF2B5EF4-FFF2-40B4-BE49-F238E27FC236}">
-                <a16:creationId xmlns:a16="http://schemas.microsoft.com/office/drawing/2014/main" id="{D35EB58C-61A7-4225-918B-A9AFFE007FDB}"/>
+                <a16:creationId xmlns:a16="http://schemas.microsoft.com/office/drawing/2014/main" id="{994E6E2B-7F66-4E84-A879-D1C6BC9D160E}"/>
               </a:ext>
             </a:extLst>
           </p:cNvPr>
@@ -1969,7 +1969,7 @@
           <p:cNvPr id="11" name="">
             <a:extLst xmlns:a="http://schemas.openxmlformats.org/drawingml/2006/main">
               <a:ext uri="{FF2B5EF4-FFF2-40B4-BE49-F238E27FC236}">
-                <a16:creationId xmlns:a16="http://schemas.microsoft.com/office/drawing/2014/main" id="{92B2339B-9D81-4F15-9F10-4B5AABB44DE6}"/>
+                <a16:creationId xmlns:a16="http://schemas.microsoft.com/office/drawing/2014/main" id="{DB9CC215-7104-4A30-84D8-048B90B9DDDD}"/>
               </a:ext>
             </a:extLst>
           </p:cNvPr>
@@ -2024,7 +2024,7 @@
     </p:spTree>
     <p:extLst>
       <p:ext uri="{BB962C8B-B14F-4D97-AF65-F5344CB8AC3E}">
-        <p14:creationId xmlns:p14="http://schemas.microsoft.com/office/powerpoint/2010/main" val="967088872"/>
+        <p14:creationId xmlns:p14="http://schemas.microsoft.com/office/powerpoint/2010/main" val="462150582"/>
       </p:ext>
     </p:extLst>
   </p:cSld>
@@ -2055,7 +2055,7 @@
           <p:cNvPr id="17" name="">
             <a:extLst xmlns:a="http://schemas.openxmlformats.org/drawingml/2006/main">
               <a:ext uri="{FF2B5EF4-FFF2-40B4-BE49-F238E27FC236}">
-                <a16:creationId xmlns:a16="http://schemas.microsoft.com/office/drawing/2014/main" id="{7CEFEC4E-8801-4C73-8491-5FD9FA0F09BB}"/>
+                <a16:creationId xmlns:a16="http://schemas.microsoft.com/office/drawing/2014/main" id="{F278D9A6-413A-40C2-B27F-C80F229849F2}"/>
               </a:ext>
             </a:extLst>
           </p:cNvPr>
@@ -2112,7 +2112,7 @@
           <p:cNvPr id="2" name="">
             <a:extLst xmlns:a="http://schemas.openxmlformats.org/drawingml/2006/main">
               <a:ext uri="{FF2B5EF4-FFF2-40B4-BE49-F238E27FC236}">
-                <a16:creationId xmlns:a16="http://schemas.microsoft.com/office/drawing/2014/main" id="{441FBB32-05A3-43CA-8BBF-124AF45A97D1}"/>
+                <a16:creationId xmlns:a16="http://schemas.microsoft.com/office/drawing/2014/main" id="{087A4A21-5330-4BDD-961C-F83DBDE31995}"/>
               </a:ext>
             </a:extLst>
           </p:cNvPr>
@@ -2169,7 +2169,7 @@
           <p:cNvPr id="3" name="">
             <a:extLst xmlns:a="http://schemas.openxmlformats.org/drawingml/2006/main">
               <a:ext uri="{FF2B5EF4-FFF2-40B4-BE49-F238E27FC236}">
-                <a16:creationId xmlns:a16="http://schemas.microsoft.com/office/drawing/2014/main" id="{491D6677-AD8C-4EEB-8F13-A9F64747982E}"/>
+                <a16:creationId xmlns:a16="http://schemas.microsoft.com/office/drawing/2014/main" id="{CFC8185B-4F6B-41FB-9353-E00B177CD050}"/>
               </a:ext>
             </a:extLst>
           </p:cNvPr>
@@ -2226,7 +2226,7 @@
           <p:cNvPr id="4" name="">
             <a:extLst xmlns:a="http://schemas.openxmlformats.org/drawingml/2006/main">
               <a:ext uri="{FF2B5EF4-FFF2-40B4-BE49-F238E27FC236}">
-                <a16:creationId xmlns:a16="http://schemas.microsoft.com/office/drawing/2014/main" id="{F4A0B6ED-5262-40FC-9E66-6140EF1C00CB}"/>
+                <a16:creationId xmlns:a16="http://schemas.microsoft.com/office/drawing/2014/main" id="{09E4407E-F52C-4F0A-89FE-35E188F17DAF}"/>
               </a:ext>
             </a:extLst>
           </p:cNvPr>
@@ -2283,7 +2283,7 @@
           <p:cNvPr id="5" name="">
             <a:extLst xmlns:a="http://schemas.openxmlformats.org/drawingml/2006/main">
               <a:ext uri="{FF2B5EF4-FFF2-40B4-BE49-F238E27FC236}">
-                <a16:creationId xmlns:a16="http://schemas.microsoft.com/office/drawing/2014/main" id="{43ED3B13-E5A1-4EE4-AB2C-A973EC48D180}"/>
+                <a16:creationId xmlns:a16="http://schemas.microsoft.com/office/drawing/2014/main" id="{A79C6A65-4A03-4E14-8802-F545075BCD58}"/>
               </a:ext>
             </a:extLst>
           </p:cNvPr>
@@ -2340,7 +2340,7 @@
           <p:cNvPr id="6" name="">
             <a:extLst xmlns:a="http://schemas.openxmlformats.org/drawingml/2006/main">
               <a:ext uri="{FF2B5EF4-FFF2-40B4-BE49-F238E27FC236}">
-                <a16:creationId xmlns:a16="http://schemas.microsoft.com/office/drawing/2014/main" id="{62B4C874-5C96-4CFB-8EE8-DB00B05FA568}"/>
+                <a16:creationId xmlns:a16="http://schemas.microsoft.com/office/drawing/2014/main" id="{CE1B536D-EA5A-45F2-91F8-FE34325D8891}"/>
               </a:ext>
             </a:extLst>
           </p:cNvPr>
@@ -2397,7 +2397,7 @@
           <p:cNvPr id="7" name="">
             <a:extLst xmlns:a="http://schemas.openxmlformats.org/drawingml/2006/main">
               <a:ext uri="{FF2B5EF4-FFF2-40B4-BE49-F238E27FC236}">
-                <a16:creationId xmlns:a16="http://schemas.microsoft.com/office/drawing/2014/main" id="{AE269B0C-39E0-4675-8EA1-108E9B8E0DA3}"/>
+                <a16:creationId xmlns:a16="http://schemas.microsoft.com/office/drawing/2014/main" id="{6277703C-F7CD-4EA7-B608-19BBF1C2AA61}"/>
               </a:ext>
             </a:extLst>
           </p:cNvPr>
@@ -2454,7 +2454,7 @@
           <p:cNvPr id="8" name="">
             <a:extLst xmlns:a="http://schemas.openxmlformats.org/drawingml/2006/main">
               <a:ext uri="{FF2B5EF4-FFF2-40B4-BE49-F238E27FC236}">
-                <a16:creationId xmlns:a16="http://schemas.microsoft.com/office/drawing/2014/main" id="{B601A08B-21B2-4B1F-8F06-6AD1B4569021}"/>
+                <a16:creationId xmlns:a16="http://schemas.microsoft.com/office/drawing/2014/main" id="{6883705B-5518-4C9E-837E-294B32B070A2}"/>
               </a:ext>
             </a:extLst>
           </p:cNvPr>
@@ -2511,7 +2511,7 @@
           <p:cNvPr id="9" name="">
             <a:extLst xmlns:a="http://schemas.openxmlformats.org/drawingml/2006/main">
               <a:ext uri="{FF2B5EF4-FFF2-40B4-BE49-F238E27FC236}">
-                <a16:creationId xmlns:a16="http://schemas.microsoft.com/office/drawing/2014/main" id="{3EFEAF3A-9521-4E11-8846-099E32D35E98}"/>
+                <a16:creationId xmlns:a16="http://schemas.microsoft.com/office/drawing/2014/main" id="{B476C90A-4C3D-4593-BD29-1C11A5162523}"/>
               </a:ext>
             </a:extLst>
           </p:cNvPr>
@@ -2568,7 +2568,7 @@
           <p:cNvPr id="10" name="">
             <a:extLst xmlns:a="http://schemas.openxmlformats.org/drawingml/2006/main">
               <a:ext uri="{FF2B5EF4-FFF2-40B4-BE49-F238E27FC236}">
-                <a16:creationId xmlns:a16="http://schemas.microsoft.com/office/drawing/2014/main" id="{FD829DEF-33CE-46AD-87DA-8E54C2DEC6EF}"/>
+                <a16:creationId xmlns:a16="http://schemas.microsoft.com/office/drawing/2014/main" id="{AA6BD494-DCF8-47A3-B52F-35922284B840}"/>
               </a:ext>
             </a:extLst>
           </p:cNvPr>
@@ -2625,7 +2625,7 @@
           <p:cNvPr id="11" name="">
             <a:extLst xmlns:a="http://schemas.openxmlformats.org/drawingml/2006/main">
               <a:ext uri="{FF2B5EF4-FFF2-40B4-BE49-F238E27FC236}">
-                <a16:creationId xmlns:a16="http://schemas.microsoft.com/office/drawing/2014/main" id="{77939D81-71A3-4FD8-ACD5-45BD80E04521}"/>
+                <a16:creationId xmlns:a16="http://schemas.microsoft.com/office/drawing/2014/main" id="{C6718860-785E-4099-9EAC-F88718EDFA85}"/>
               </a:ext>
             </a:extLst>
           </p:cNvPr>
@@ -2682,7 +2682,7 @@
           <p:cNvPr id="12" name="">
             <a:extLst xmlns:a="http://schemas.openxmlformats.org/drawingml/2006/main">
               <a:ext uri="{FF2B5EF4-FFF2-40B4-BE49-F238E27FC236}">
-                <a16:creationId xmlns:a16="http://schemas.microsoft.com/office/drawing/2014/main" id="{1A7C9352-6EBF-46AA-8F03-A01C4019DAC2}"/>
+                <a16:creationId xmlns:a16="http://schemas.microsoft.com/office/drawing/2014/main" id="{EED8352C-55FB-4835-9D5A-96A645311668}"/>
               </a:ext>
             </a:extLst>
           </p:cNvPr>
@@ -2775,7 +2775,7 @@
                 <a:ea typeface="Arial"/>
                 <a:cs typeface="Arial"/>
               </a:rPr>
-              <a:t>$120k contribution</a:t>
+              <a:t>$120k operating surplus</a:t>
             </a:r>
           </a:p>
         </p:txBody>
@@ -2785,7 +2785,7 @@
           <p:cNvPr id="13" name="">
             <a:extLst xmlns:a="http://schemas.openxmlformats.org/drawingml/2006/main">
               <a:ext uri="{FF2B5EF4-FFF2-40B4-BE49-F238E27FC236}">
-                <a16:creationId xmlns:a16="http://schemas.microsoft.com/office/drawing/2014/main" id="{0D076986-B375-4DDF-9219-E694AA032E8E}"/>
+                <a16:creationId xmlns:a16="http://schemas.microsoft.com/office/drawing/2014/main" id="{BE95D196-1532-4BE5-8F2C-5E1544514DD7}"/>
               </a:ext>
             </a:extLst>
           </p:cNvPr>
@@ -2842,7 +2842,7 @@
           <p:cNvPr id="14" name="">
             <a:extLst xmlns:a="http://schemas.openxmlformats.org/drawingml/2006/main">
               <a:ext uri="{FF2B5EF4-FFF2-40B4-BE49-F238E27FC236}">
-                <a16:creationId xmlns:a16="http://schemas.microsoft.com/office/drawing/2014/main" id="{1E813074-2F1D-42D7-ABDE-91EBDE9E2E5B}"/>
+                <a16:creationId xmlns:a16="http://schemas.microsoft.com/office/drawing/2014/main" id="{460C6688-E2B8-45A1-A92D-BD1C7BB2783A}"/>
               </a:ext>
             </a:extLst>
           </p:cNvPr>
@@ -2935,7 +2935,7 @@
                 <a:ea typeface="Arial"/>
                 <a:cs typeface="Arial"/>
               </a:rPr>
-              <a:t>$40k contribution</a:t>
+              <a:t>$40k operating surplus</a:t>
             </a:r>
           </a:p>
         </p:txBody>
@@ -2945,7 +2945,7 @@
           <p:cNvPr id="15" name="">
             <a:extLst xmlns:a="http://schemas.openxmlformats.org/drawingml/2006/main">
               <a:ext uri="{FF2B5EF4-FFF2-40B4-BE49-F238E27FC236}">
-                <a16:creationId xmlns:a16="http://schemas.microsoft.com/office/drawing/2014/main" id="{0D8C4E34-1E2E-4BAB-B615-1173DBA6AD59}"/>
+                <a16:creationId xmlns:a16="http://schemas.microsoft.com/office/drawing/2014/main" id="{66E03E31-1E42-4D03-B964-4752F3D0ADF8}"/>
               </a:ext>
             </a:extLst>
           </p:cNvPr>
@@ -3002,7 +3002,7 @@
           <p:cNvPr id="16" name="">
             <a:extLst xmlns:a="http://schemas.openxmlformats.org/drawingml/2006/main">
               <a:ext uri="{FF2B5EF4-FFF2-40B4-BE49-F238E27FC236}">
-                <a16:creationId xmlns:a16="http://schemas.microsoft.com/office/drawing/2014/main" id="{048FDDE9-8DE4-4916-AA2A-A2D5D275E6EC}"/>
+                <a16:creationId xmlns:a16="http://schemas.microsoft.com/office/drawing/2014/main" id="{99B5E574-5782-4DD0-A362-771381D7171B}"/>
               </a:ext>
             </a:extLst>
           </p:cNvPr>
@@ -3103,7 +3103,7 @@
     </p:spTree>
     <p:extLst>
       <p:ext uri="{BB962C8B-B14F-4D97-AF65-F5344CB8AC3E}">
-        <p14:creationId xmlns:p14="http://schemas.microsoft.com/office/powerpoint/2010/main" val="103180440"/>
+        <p14:creationId xmlns:p14="http://schemas.microsoft.com/office/powerpoint/2010/main" val="857503865"/>
       </p:ext>
     </p:extLst>
   </p:cSld>
@@ -3134,7 +3134,7 @@
           <p:cNvPr id="13" name="">
             <a:extLst xmlns:a="http://schemas.openxmlformats.org/drawingml/2006/main">
               <a:ext uri="{FF2B5EF4-FFF2-40B4-BE49-F238E27FC236}">
-                <a16:creationId xmlns:a16="http://schemas.microsoft.com/office/drawing/2014/main" id="{5F4D77A2-90EB-4F9C-8FD6-D1CA754BE25C}"/>
+                <a16:creationId xmlns:a16="http://schemas.microsoft.com/office/drawing/2014/main" id="{FACA1A5C-9C1C-42F6-8974-9A3316598B37}"/>
               </a:ext>
             </a:extLst>
           </p:cNvPr>
@@ -3191,7 +3191,7 @@
           <p:cNvPr id="2" name="">
             <a:extLst xmlns:a="http://schemas.openxmlformats.org/drawingml/2006/main">
               <a:ext uri="{FF2B5EF4-FFF2-40B4-BE49-F238E27FC236}">
-                <a16:creationId xmlns:a16="http://schemas.microsoft.com/office/drawing/2014/main" id="{5F050ABF-F7A2-4C20-9324-C0B82360CF47}"/>
+                <a16:creationId xmlns:a16="http://schemas.microsoft.com/office/drawing/2014/main" id="{087F3983-EBA3-4C31-871A-F957FEE5B6DB}"/>
               </a:ext>
             </a:extLst>
           </p:cNvPr>
@@ -3248,7 +3248,7 @@
           <p:cNvPr id="3" name="">
             <a:extLst xmlns:a="http://schemas.openxmlformats.org/drawingml/2006/main">
               <a:ext uri="{FF2B5EF4-FFF2-40B4-BE49-F238E27FC236}">
-                <a16:creationId xmlns:a16="http://schemas.microsoft.com/office/drawing/2014/main" id="{944DA476-7823-4A2E-9C84-D1DEE43AFA1C}"/>
+                <a16:creationId xmlns:a16="http://schemas.microsoft.com/office/drawing/2014/main" id="{DA6D8006-163D-4BB5-B2BD-4B3D0B361521}"/>
               </a:ext>
             </a:extLst>
           </p:cNvPr>
@@ -3305,7 +3305,7 @@
           <p:cNvPr id="4" name="">
             <a:extLst xmlns:a="http://schemas.openxmlformats.org/drawingml/2006/main">
               <a:ext uri="{FF2B5EF4-FFF2-40B4-BE49-F238E27FC236}">
-                <a16:creationId xmlns:a16="http://schemas.microsoft.com/office/drawing/2014/main" id="{EB706911-4463-4190-8D3A-EE4F06E7422D}"/>
+                <a16:creationId xmlns:a16="http://schemas.microsoft.com/office/drawing/2014/main" id="{AA77F691-6275-44F2-99CD-E1C38C8AECD2}"/>
               </a:ext>
             </a:extLst>
           </p:cNvPr>
@@ -3362,7 +3362,7 @@
           <p:cNvPr id="5" name="">
             <a:extLst xmlns:a="http://schemas.openxmlformats.org/drawingml/2006/main">
               <a:ext uri="{FF2B5EF4-FFF2-40B4-BE49-F238E27FC236}">
-                <a16:creationId xmlns:a16="http://schemas.microsoft.com/office/drawing/2014/main" id="{E30EFBA8-8B86-4956-A8A4-62450268912F}"/>
+                <a16:creationId xmlns:a16="http://schemas.microsoft.com/office/drawing/2014/main" id="{C1902665-8F2D-4FF4-8CAD-B4552F8EEE8E}"/>
               </a:ext>
             </a:extLst>
           </p:cNvPr>
@@ -3419,7 +3419,7 @@
           <p:cNvPr id="6" name="">
             <a:extLst xmlns:a="http://schemas.openxmlformats.org/drawingml/2006/main">
               <a:ext uri="{FF2B5EF4-FFF2-40B4-BE49-F238E27FC236}">
-                <a16:creationId xmlns:a16="http://schemas.microsoft.com/office/drawing/2014/main" id="{04A43E01-75C4-4FE5-8169-E152342397D8}"/>
+                <a16:creationId xmlns:a16="http://schemas.microsoft.com/office/drawing/2014/main" id="{E8AD43D0-04D7-4CA3-8507-ED89CA784D6A}"/>
               </a:ext>
             </a:extLst>
           </p:cNvPr>
@@ -3499,7 +3499,7 @@
           <p:cNvPr id="7" name="">
             <a:extLst xmlns:a="http://schemas.openxmlformats.org/drawingml/2006/main">
               <a:ext uri="{FF2B5EF4-FFF2-40B4-BE49-F238E27FC236}">
-                <a16:creationId xmlns:a16="http://schemas.microsoft.com/office/drawing/2014/main" id="{37CACF07-AA00-474A-A67A-8F224485841B}"/>
+                <a16:creationId xmlns:a16="http://schemas.microsoft.com/office/drawing/2014/main" id="{FDEB4D9B-6EDB-4017-B415-60810C8453A8}"/>
               </a:ext>
             </a:extLst>
           </p:cNvPr>
@@ -3556,7 +3556,7 @@
           <p:cNvPr id="8" name="">
             <a:extLst xmlns:a="http://schemas.openxmlformats.org/drawingml/2006/main">
               <a:ext uri="{FF2B5EF4-FFF2-40B4-BE49-F238E27FC236}">
-                <a16:creationId xmlns:a16="http://schemas.microsoft.com/office/drawing/2014/main" id="{0F7B4E7E-E02B-4675-94E9-7B1686DD8FD8}"/>
+                <a16:creationId xmlns:a16="http://schemas.microsoft.com/office/drawing/2014/main" id="{84AFBF6E-AC50-429F-A2C6-AFAEB1800119}"/>
               </a:ext>
             </a:extLst>
           </p:cNvPr>
@@ -3636,7 +3636,7 @@
           <p:cNvPr id="9" name="">
             <a:extLst xmlns:a="http://schemas.openxmlformats.org/drawingml/2006/main">
               <a:ext uri="{FF2B5EF4-FFF2-40B4-BE49-F238E27FC236}">
-                <a16:creationId xmlns:a16="http://schemas.microsoft.com/office/drawing/2014/main" id="{74C0B4EE-AEAB-45F5-8236-471F55366268}"/>
+                <a16:creationId xmlns:a16="http://schemas.microsoft.com/office/drawing/2014/main" id="{806C3EC0-B47C-430D-8416-AF659F197427}"/>
               </a:ext>
             </a:extLst>
           </p:cNvPr>
@@ -3693,7 +3693,7 @@
           <p:cNvPr id="10" name="">
             <a:extLst xmlns:a="http://schemas.openxmlformats.org/drawingml/2006/main">
               <a:ext uri="{FF2B5EF4-FFF2-40B4-BE49-F238E27FC236}">
-                <a16:creationId xmlns:a16="http://schemas.microsoft.com/office/drawing/2014/main" id="{F14D2BAF-5F88-486D-B7BE-9CB1766E0A9C}"/>
+                <a16:creationId xmlns:a16="http://schemas.microsoft.com/office/drawing/2014/main" id="{82031127-9ADE-4873-BAD5-1F729B8A5C94}"/>
               </a:ext>
             </a:extLst>
           </p:cNvPr>
@@ -3773,7 +3773,7 @@
           <p:cNvPr id="11" name="">
             <a:extLst xmlns:a="http://schemas.openxmlformats.org/drawingml/2006/main">
               <a:ext uri="{FF2B5EF4-FFF2-40B4-BE49-F238E27FC236}">
-                <a16:creationId xmlns:a16="http://schemas.microsoft.com/office/drawing/2014/main" id="{F13E6C31-129D-4576-AE16-BB1818C6EDF4}"/>
+                <a16:creationId xmlns:a16="http://schemas.microsoft.com/office/drawing/2014/main" id="{4D855996-D397-4A5C-AD62-B9B4874C65D5}"/>
               </a:ext>
             </a:extLst>
           </p:cNvPr>
@@ -3830,7 +3830,7 @@
           <p:cNvPr id="12" name="">
             <a:extLst xmlns:a="http://schemas.openxmlformats.org/drawingml/2006/main">
               <a:ext uri="{FF2B5EF4-FFF2-40B4-BE49-F238E27FC236}">
-                <a16:creationId xmlns:a16="http://schemas.microsoft.com/office/drawing/2014/main" id="{3589B9E3-D036-45C7-BE8E-B4E7BA4320C4}"/>
+                <a16:creationId xmlns:a16="http://schemas.microsoft.com/office/drawing/2014/main" id="{73E37CFE-C0CB-494D-947D-69428B7F5823}"/>
               </a:ext>
             </a:extLst>
           </p:cNvPr>
@@ -3908,7 +3908,7 @@
     </p:spTree>
     <p:extLst>
       <p:ext uri="{BB962C8B-B14F-4D97-AF65-F5344CB8AC3E}">
-        <p14:creationId xmlns:p14="http://schemas.microsoft.com/office/powerpoint/2010/main" val="1433291733"/>
+        <p14:creationId xmlns:p14="http://schemas.microsoft.com/office/powerpoint/2010/main" val="88908379"/>
       </p:ext>
     </p:extLst>
   </p:cSld>
